--- a/slides/sesion-09.pptx
+++ b/slides/sesion-09.pptx
@@ -6376,7 +6376,7 @@
                 </a:solidFill>
                 <a:latin typeface="Calibri"/>
               </a:rPr>
-              <a:t>•  Demo Day (sesión 10): defensa del Proyecto Final + pitch</a:t>
+              <a:t>•  Sesión 10: Examen Final escrito en línea + Demo Day (entrega + pitch)</a:t>
             </a:r>
           </a:p>
         </p:txBody>

--- a/slides/sesion-09.pptx
+++ b/slides/sesion-09.pptx
@@ -3383,7 +3383,7 @@
             <a:r>
               <a:rPr sz="1500" b="0">
                 <a:solidFill>
-                  <a:srgbClr val="8A7C70"/>
+                  <a:srgbClr val="6F645B"/>
                 </a:solidFill>
                 <a:latin typeface="Calibri"/>
               </a:rPr>
@@ -5161,7 +5161,7 @@
             <a:r>
               <a:rPr sz="1050" b="0">
                 <a:solidFill>
-                  <a:srgbClr val="8A7C70"/>
+                  <a:srgbClr val="6F645B"/>
                 </a:solidFill>
                 <a:latin typeface="Calibri"/>
               </a:rPr>
@@ -5368,7 +5368,7 @@
             <a:r>
               <a:rPr sz="1050" b="0">
                 <a:solidFill>
-                  <a:srgbClr val="8A7C70"/>
+                  <a:srgbClr val="6F645B"/>
                 </a:solidFill>
                 <a:latin typeface="Calibri"/>
               </a:rPr>
@@ -5575,7 +5575,7 @@
             <a:r>
               <a:rPr sz="1050" b="0">
                 <a:solidFill>
-                  <a:srgbClr val="8A7C70"/>
+                  <a:srgbClr val="6F645B"/>
                 </a:solidFill>
                 <a:latin typeface="Calibri"/>
               </a:rPr>
